--- a/theory_bonus-exam_and_project_discussion_qa/theory_bonus-exam_and_project_discussion_qa.pptx
+++ b/theory_bonus-exam_and_project_discussion_qa/theory_bonus-exam_and_project_discussion_qa.pptx
@@ -228,7 +228,7 @@
           <a:p>
             <a:fld id="{81C4B3FE-0320-8142-8396-5C3025C019EC}" type="datetimeFigureOut">
               <a:rPr lang="en-IT" smtClean="0"/>
-              <a:t>5/16/24</a:t>
+              <a:t>5/20/25</a:t>
             </a:fld>
             <a:endParaRPr lang="en-IT"/>
           </a:p>
@@ -2205,7 +2205,9 @@
           <a:lstStyle>
             <a:lvl1pPr marL="0" indent="0" algn="ctr">
               <a:buNone/>
-              <a:defRPr sz="4800" b="1"/>
+              <a:defRPr sz="4800" b="1">
+                <a:latin typeface="Aptos" panose="020B0004020202020204" pitchFamily="34" charset="0"/>
+              </a:defRPr>
             </a:lvl1pPr>
             <a:lvl2pPr marL="457200" indent="0" algn="ctr">
               <a:buNone/>
@@ -2291,7 +2293,9 @@
           <a:lstStyle/>
           <a:p>
             <a:pPr algn="ctr"/>
-            <a:endParaRPr lang="en-GB" dirty="0"/>
+            <a:endParaRPr lang="en-GB" dirty="0">
+              <a:latin typeface="Aptos" panose="020B0004020202020204" pitchFamily="34" charset="0"/>
+            </a:endParaRPr>
           </a:p>
         </p:txBody>
       </p:sp>
@@ -2341,7 +2345,9 @@
           <a:lstStyle/>
           <a:p>
             <a:pPr algn="ctr"/>
-            <a:endParaRPr lang="en-GB" dirty="0"/>
+            <a:endParaRPr lang="en-GB" dirty="0">
+              <a:latin typeface="Aptos" panose="020B0004020202020204" pitchFamily="34" charset="0"/>
+            </a:endParaRPr>
           </a:p>
         </p:txBody>
       </p:sp>
@@ -2387,36 +2393,52 @@
           </a:lstStyle>
           <a:p>
             <a:r>
-              <a:rPr lang="it-IT" sz="2800" b="0" dirty="0" err="1"/>
+              <a:rPr lang="it-IT" sz="2800" b="0" dirty="0" err="1">
+                <a:latin typeface="Aptos" panose="020B0004020202020204" pitchFamily="34" charset="0"/>
+              </a:rPr>
               <a:t>Biomedical</a:t>
             </a:r>
             <a:r>
-              <a:rPr lang="it-IT" sz="2800" b="0" dirty="0"/>
+              <a:rPr lang="it-IT" sz="2800" b="0" dirty="0">
+                <a:latin typeface="Aptos" panose="020B0004020202020204" pitchFamily="34" charset="0"/>
+              </a:rPr>
               <a:t> </a:t>
             </a:r>
             <a:r>
-              <a:rPr lang="it-IT" sz="2800" b="0" dirty="0" err="1"/>
+              <a:rPr lang="it-IT" sz="2800" b="0" dirty="0" err="1">
+                <a:latin typeface="Aptos" panose="020B0004020202020204" pitchFamily="34" charset="0"/>
+              </a:rPr>
               <a:t>Wearable</a:t>
             </a:r>
             <a:r>
-              <a:rPr lang="it-IT" sz="2800" b="0" dirty="0"/>
+              <a:rPr lang="it-IT" sz="2800" b="0" dirty="0">
+                <a:latin typeface="Aptos" panose="020B0004020202020204" pitchFamily="34" charset="0"/>
+              </a:rPr>
               <a:t> Technologies </a:t>
             </a:r>
           </a:p>
           <a:p>
             <a:r>
-              <a:rPr lang="it-IT" sz="2800" b="0" dirty="0"/>
+              <a:rPr lang="it-IT" sz="2800" b="0" dirty="0">
+                <a:latin typeface="Aptos" panose="020B0004020202020204" pitchFamily="34" charset="0"/>
+              </a:rPr>
               <a:t>for Healthcare and </a:t>
             </a:r>
             <a:r>
-              <a:rPr lang="it-IT" sz="2800" b="0" dirty="0" err="1"/>
+              <a:rPr lang="it-IT" sz="2800" b="0" dirty="0" err="1">
+                <a:latin typeface="Aptos" panose="020B0004020202020204" pitchFamily="34" charset="0"/>
+              </a:rPr>
               <a:t>Wellbeing</a:t>
             </a:r>
             <a:r>
-              <a:rPr lang="it-IT" sz="2800" b="0" dirty="0"/>
+              <a:rPr lang="it-IT" sz="2800" b="0" dirty="0">
+                <a:latin typeface="Aptos" panose="020B0004020202020204" pitchFamily="34" charset="0"/>
+              </a:rPr>
               <a:t>  </a:t>
             </a:r>
-            <a:endParaRPr lang="en-GB" sz="2800" b="0" dirty="0"/>
+            <a:endParaRPr lang="en-GB" sz="2800" b="0" dirty="0">
+              <a:latin typeface="Aptos" panose="020B0004020202020204" pitchFamily="34" charset="0"/>
+            </a:endParaRPr>
           </a:p>
         </p:txBody>
       </p:sp>
@@ -2467,8 +2489,10 @@
               </a:spcAft>
             </a:pPr>
             <a:r>
-              <a:rPr lang="it-IT" sz="2800" dirty="0"/>
-              <a:t>A.Y. 2023-2024</a:t>
+              <a:rPr lang="it-IT" sz="2800" dirty="0">
+                <a:latin typeface="Aptos" panose="020B0004020202020204" pitchFamily="34" charset="0"/>
+              </a:rPr>
+              <a:t>A.Y. 2024-2025</a:t>
             </a:r>
           </a:p>
         </p:txBody>
@@ -2507,7 +2531,7 @@
                 <a:effectLst/>
                 <a:uLnTx/>
                 <a:uFillTx/>
-                <a:latin typeface="Palatino Linotype" panose="02040502050505030304" pitchFamily="18" charset="0"/>
+                <a:latin typeface="Aptos" panose="020B0004020202020204" pitchFamily="34" charset="0"/>
                 <a:ea typeface="+mj-ea"/>
                 <a:cs typeface="+mj-cs"/>
               </a:rPr>
@@ -2524,7 +2548,7 @@
                 <a:effectLst/>
                 <a:uLnTx/>
                 <a:uFillTx/>
-                <a:latin typeface="Palatino Linotype" panose="02040502050505030304" pitchFamily="18" charset="0"/>
+                <a:latin typeface="Aptos" panose="020B0004020202020204" pitchFamily="34" charset="0"/>
                 <a:ea typeface="+mj-ea"/>
                 <a:cs typeface="+mj-cs"/>
               </a:rPr>
@@ -2541,7 +2565,7 @@
                 <a:effectLst/>
                 <a:uLnTx/>
                 <a:uFillTx/>
-                <a:latin typeface="Palatino Linotype" panose="02040502050505030304" pitchFamily="18" charset="0"/>
+                <a:latin typeface="Aptos" panose="020B0004020202020204" pitchFamily="34" charset="0"/>
                 <a:ea typeface="+mj-ea"/>
                 <a:cs typeface="+mj-cs"/>
               </a:rPr>
@@ -2557,7 +2581,7 @@
                 <a:effectLst/>
                 <a:uLnTx/>
                 <a:uFillTx/>
-                <a:latin typeface="Palatino Linotype" panose="02040502050505030304" pitchFamily="18" charset="0"/>
+                <a:latin typeface="Aptos" panose="020B0004020202020204" pitchFamily="34" charset="0"/>
                 <a:ea typeface="+mj-ea"/>
                 <a:cs typeface="+mj-cs"/>
               </a:rPr>
@@ -2574,7 +2598,7 @@
                 <a:effectLst/>
                 <a:uLnTx/>
                 <a:uFillTx/>
-                <a:latin typeface="Palatino Linotype" panose="02040502050505030304" pitchFamily="18" charset="0"/>
+                <a:latin typeface="Aptos" panose="020B0004020202020204" pitchFamily="34" charset="0"/>
                 <a:ea typeface="+mj-ea"/>
                 <a:cs typeface="+mj-cs"/>
               </a:rPr>
@@ -2591,13 +2615,15 @@
                 <a:effectLst/>
                 <a:uLnTx/>
                 <a:uFillTx/>
-                <a:latin typeface="Palatino Linotype" panose="02040502050505030304" pitchFamily="18" charset="0"/>
+                <a:latin typeface="Aptos" panose="020B0004020202020204" pitchFamily="34" charset="0"/>
                 <a:ea typeface="+mj-ea"/>
                 <a:cs typeface="+mj-cs"/>
               </a:rPr>
               <a:t>Engineering</a:t>
             </a:r>
-            <a:endParaRPr lang="en-GB" sz="1100" cap="small" baseline="0" dirty="0"/>
+            <a:endParaRPr lang="en-GB" sz="1100" cap="small" baseline="0" dirty="0">
+              <a:latin typeface="Aptos" panose="020B0004020202020204" pitchFamily="34" charset="0"/>
+            </a:endParaRPr>
           </a:p>
         </p:txBody>
       </p:sp>
@@ -2707,7 +2733,9 @@
           </a:bodyPr>
           <a:lstStyle>
             <a:lvl1pPr>
-              <a:defRPr sz="3200"/>
+              <a:defRPr sz="3200">
+                <a:latin typeface="Aptos" panose="020B0004020202020204" pitchFamily="34" charset="0"/>
+              </a:defRPr>
             </a:lvl1pPr>
           </a:lstStyle>
           <a:p>
@@ -3107,12 +3135,14 @@
                     <a:tint val="75000"/>
                   </a:schemeClr>
                 </a:solidFill>
+                <a:latin typeface="Aptos" panose="020B0004020202020204" pitchFamily="34" charset="0"/>
               </a:defRPr>
             </a:lvl1pPr>
           </a:lstStyle>
           <a:p>
             <a:fld id="{31DE2C5B-556E-47B8-A792-024C2FCA4ACC}" type="slidenum">
               <a:rPr lang="en-GB" smtClean="0"/>
+              <a:pPr/>
               <a:t>‹#›</a:t>
             </a:fld>
             <a:endParaRPr lang="en-GB"/>
@@ -3147,7 +3177,7 @@
           <a:solidFill>
             <a:schemeClr val="tx1"/>
           </a:solidFill>
-          <a:latin typeface="Palatino Linotype" panose="02040502050505030304" pitchFamily="18" charset="0"/>
+          <a:latin typeface="Aptos" panose="020B0004020202020204" pitchFamily="34" charset="0"/>
           <a:ea typeface="+mj-ea"/>
           <a:cs typeface="+mj-cs"/>
         </a:defRPr>
@@ -3170,7 +3200,7 @@
           <a:solidFill>
             <a:schemeClr val="tx1"/>
           </a:solidFill>
-          <a:latin typeface="Palatino Linotype" panose="02040502050505030304" pitchFamily="18" charset="0"/>
+          <a:latin typeface="Aptos" panose="020B0004020202020204" pitchFamily="34" charset="0"/>
           <a:ea typeface="+mn-ea"/>
           <a:cs typeface="+mn-cs"/>
         </a:defRPr>
@@ -3191,7 +3221,7 @@
           <a:solidFill>
             <a:schemeClr val="tx1"/>
           </a:solidFill>
-          <a:latin typeface="Palatino Linotype" panose="02040502050505030304" pitchFamily="18" charset="0"/>
+          <a:latin typeface="Aptos" panose="020B0004020202020204" pitchFamily="34" charset="0"/>
           <a:ea typeface="+mn-ea"/>
           <a:cs typeface="+mn-cs"/>
         </a:defRPr>
@@ -3212,7 +3242,7 @@
           <a:solidFill>
             <a:schemeClr val="tx1"/>
           </a:solidFill>
-          <a:latin typeface="Palatino Linotype" panose="02040502050505030304" pitchFamily="18" charset="0"/>
+          <a:latin typeface="Aptos" panose="020B0004020202020204" pitchFamily="34" charset="0"/>
           <a:ea typeface="+mn-ea"/>
           <a:cs typeface="+mn-cs"/>
         </a:defRPr>
@@ -3233,7 +3263,7 @@
           <a:solidFill>
             <a:schemeClr val="tx1"/>
           </a:solidFill>
-          <a:latin typeface="Palatino Linotype" panose="02040502050505030304" pitchFamily="18" charset="0"/>
+          <a:latin typeface="Aptos" panose="020B0004020202020204" pitchFamily="34" charset="0"/>
           <a:ea typeface="+mn-ea"/>
           <a:cs typeface="+mn-cs"/>
         </a:defRPr>
@@ -3254,7 +3284,7 @@
           <a:solidFill>
             <a:schemeClr val="tx1"/>
           </a:solidFill>
-          <a:latin typeface="Palatino Linotype" panose="02040502050505030304" pitchFamily="18" charset="0"/>
+          <a:latin typeface="Aptos" panose="020B0004020202020204" pitchFamily="34" charset="0"/>
           <a:ea typeface="+mn-ea"/>
           <a:cs typeface="+mn-cs"/>
         </a:defRPr>
@@ -3610,7 +3640,6 @@
             <a:r>
               <a:rPr lang="en-US" sz="2800" dirty="0">
                 <a:effectLst/>
-                <a:latin typeface="Palatino Linotype" panose="02040502050505030304" pitchFamily="18" charset="0"/>
                 <a:ea typeface="Calibri" panose="020F0502020204030204" pitchFamily="34" charset="0"/>
                 <a:cs typeface="Times New Roman" panose="02020603050405020304" pitchFamily="18" charset="0"/>
               </a:rPr>
@@ -3618,7 +3647,6 @@
             </a:r>
             <a:endParaRPr lang="it-IT" sz="2800" dirty="0">
               <a:effectLst/>
-              <a:latin typeface="Calibri" panose="020F0502020204030204" pitchFamily="34" charset="0"/>
               <a:ea typeface="Calibri" panose="020F0502020204030204" pitchFamily="34" charset="0"/>
               <a:cs typeface="Times New Roman" panose="02020603050405020304" pitchFamily="18" charset="0"/>
             </a:endParaRPr>
@@ -3631,7 +3659,6 @@
             <a:r>
               <a:rPr lang="en-US" sz="2800" dirty="0">
                 <a:effectLst/>
-                <a:latin typeface="Palatino Linotype" panose="02040502050505030304" pitchFamily="18" charset="0"/>
                 <a:ea typeface="Calibri" panose="020F0502020204030204" pitchFamily="34" charset="0"/>
                 <a:cs typeface="Times New Roman" panose="02020603050405020304" pitchFamily="18" charset="0"/>
               </a:rPr>
@@ -3639,7 +3666,6 @@
             </a:r>
             <a:endParaRPr lang="it-IT" sz="2800" dirty="0">
               <a:effectLst/>
-              <a:latin typeface="Calibri" panose="020F0502020204030204" pitchFamily="34" charset="0"/>
               <a:ea typeface="Calibri" panose="020F0502020204030204" pitchFamily="34" charset="0"/>
               <a:cs typeface="Times New Roman" panose="02020603050405020304" pitchFamily="18" charset="0"/>
             </a:endParaRPr>
@@ -3652,7 +3678,6 @@
             <a:r>
               <a:rPr lang="en-US" sz="2800" dirty="0">
                 <a:effectLst/>
-                <a:latin typeface="Palatino Linotype" panose="02040502050505030304" pitchFamily="18" charset="0"/>
                 <a:ea typeface="Calibri" panose="020F0502020204030204" pitchFamily="34" charset="0"/>
                 <a:cs typeface="Times New Roman" panose="02020603050405020304" pitchFamily="18" charset="0"/>
               </a:rPr>
@@ -3660,7 +3685,6 @@
             </a:r>
             <a:endParaRPr lang="it-IT" sz="2800" dirty="0">
               <a:effectLst/>
-              <a:latin typeface="Calibri" panose="020F0502020204030204" pitchFamily="34" charset="0"/>
               <a:ea typeface="Calibri" panose="020F0502020204030204" pitchFamily="34" charset="0"/>
               <a:cs typeface="Times New Roman" panose="02020603050405020304" pitchFamily="18" charset="0"/>
             </a:endParaRPr>
@@ -3673,7 +3697,6 @@
             <a:r>
               <a:rPr lang="en-US" sz="2800" dirty="0">
                 <a:effectLst/>
-                <a:latin typeface="Palatino Linotype" panose="02040502050505030304" pitchFamily="18" charset="0"/>
                 <a:ea typeface="Calibri" panose="020F0502020204030204" pitchFamily="34" charset="0"/>
                 <a:cs typeface="Times New Roman" panose="02020603050405020304" pitchFamily="18" charset="0"/>
               </a:rPr>
@@ -3681,7 +3704,6 @@
             </a:r>
             <a:endParaRPr lang="it-IT" sz="2800" dirty="0">
               <a:effectLst/>
-              <a:latin typeface="Calibri" panose="020F0502020204030204" pitchFamily="34" charset="0"/>
               <a:ea typeface="Calibri" panose="020F0502020204030204" pitchFamily="34" charset="0"/>
               <a:cs typeface="Times New Roman" panose="02020603050405020304" pitchFamily="18" charset="0"/>
             </a:endParaRPr>
@@ -3694,7 +3716,6 @@
             <a:r>
               <a:rPr lang="en-US" sz="2800" dirty="0">
                 <a:effectLst/>
-                <a:latin typeface="Palatino Linotype" panose="02040502050505030304" pitchFamily="18" charset="0"/>
                 <a:ea typeface="Calibri" panose="020F0502020204030204" pitchFamily="34" charset="0"/>
                 <a:cs typeface="Times New Roman" panose="02020603050405020304" pitchFamily="18" charset="0"/>
               </a:rPr>
@@ -3702,7 +3723,6 @@
             </a:r>
             <a:endParaRPr lang="it-IT" sz="2800" dirty="0">
               <a:effectLst/>
-              <a:latin typeface="Calibri" panose="020F0502020204030204" pitchFamily="34" charset="0"/>
               <a:ea typeface="Calibri" panose="020F0502020204030204" pitchFamily="34" charset="0"/>
               <a:cs typeface="Times New Roman" panose="02020603050405020304" pitchFamily="18" charset="0"/>
             </a:endParaRPr>
@@ -3848,7 +3868,6 @@
             <a:r>
               <a:rPr lang="en-US" sz="2800" dirty="0">
                 <a:effectLst/>
-                <a:latin typeface="Palatino Linotype" panose="02040502050505030304" pitchFamily="18" charset="0"/>
                 <a:ea typeface="Calibri" panose="020F0502020204030204" pitchFamily="34" charset="0"/>
                 <a:cs typeface="Times New Roman" panose="02020603050405020304" pitchFamily="18" charset="0"/>
               </a:rPr>
@@ -3856,7 +3875,6 @@
             </a:r>
             <a:endParaRPr lang="it-IT" sz="2800" dirty="0">
               <a:effectLst/>
-              <a:latin typeface="Calibri" panose="020F0502020204030204" pitchFamily="34" charset="0"/>
               <a:ea typeface="Calibri" panose="020F0502020204030204" pitchFamily="34" charset="0"/>
               <a:cs typeface="Times New Roman" panose="02020603050405020304" pitchFamily="18" charset="0"/>
             </a:endParaRPr>
@@ -3872,7 +3890,6 @@
                   <a:srgbClr val="00B050"/>
                 </a:solidFill>
                 <a:effectLst/>
-                <a:latin typeface="Palatino Linotype" panose="02040502050505030304" pitchFamily="18" charset="0"/>
                 <a:ea typeface="Calibri" panose="020F0502020204030204" pitchFamily="34" charset="0"/>
                 <a:cs typeface="Times New Roman" panose="02020603050405020304" pitchFamily="18" charset="0"/>
               </a:rPr>
@@ -3880,7 +3897,6 @@
             </a:r>
             <a:endParaRPr lang="it-IT" sz="2800" b="1" dirty="0">
               <a:effectLst/>
-              <a:latin typeface="Calibri" panose="020F0502020204030204" pitchFamily="34" charset="0"/>
               <a:ea typeface="Calibri" panose="020F0502020204030204" pitchFamily="34" charset="0"/>
               <a:cs typeface="Times New Roman" panose="02020603050405020304" pitchFamily="18" charset="0"/>
             </a:endParaRPr>
@@ -3893,7 +3909,6 @@
             <a:r>
               <a:rPr lang="en-US" sz="2800" dirty="0">
                 <a:effectLst/>
-                <a:latin typeface="Palatino Linotype" panose="02040502050505030304" pitchFamily="18" charset="0"/>
                 <a:ea typeface="Calibri" panose="020F0502020204030204" pitchFamily="34" charset="0"/>
                 <a:cs typeface="Times New Roman" panose="02020603050405020304" pitchFamily="18" charset="0"/>
               </a:rPr>
@@ -3901,7 +3916,6 @@
             </a:r>
             <a:endParaRPr lang="it-IT" sz="2800" dirty="0">
               <a:effectLst/>
-              <a:latin typeface="Calibri" panose="020F0502020204030204" pitchFamily="34" charset="0"/>
               <a:ea typeface="Calibri" panose="020F0502020204030204" pitchFamily="34" charset="0"/>
               <a:cs typeface="Times New Roman" panose="02020603050405020304" pitchFamily="18" charset="0"/>
             </a:endParaRPr>
@@ -3914,7 +3928,6 @@
             <a:r>
               <a:rPr lang="en-US" sz="2800" dirty="0">
                 <a:effectLst/>
-                <a:latin typeface="Palatino Linotype" panose="02040502050505030304" pitchFamily="18" charset="0"/>
                 <a:ea typeface="Calibri" panose="020F0502020204030204" pitchFamily="34" charset="0"/>
                 <a:cs typeface="Times New Roman" panose="02020603050405020304" pitchFamily="18" charset="0"/>
               </a:rPr>
@@ -3922,7 +3935,6 @@
             </a:r>
             <a:endParaRPr lang="it-IT" sz="2800" dirty="0">
               <a:effectLst/>
-              <a:latin typeface="Calibri" panose="020F0502020204030204" pitchFamily="34" charset="0"/>
               <a:ea typeface="Calibri" panose="020F0502020204030204" pitchFamily="34" charset="0"/>
               <a:cs typeface="Times New Roman" panose="02020603050405020304" pitchFamily="18" charset="0"/>
             </a:endParaRPr>
@@ -3935,7 +3947,6 @@
             <a:r>
               <a:rPr lang="en-US" sz="2800" dirty="0">
                 <a:effectLst/>
-                <a:latin typeface="Palatino Linotype" panose="02040502050505030304" pitchFamily="18" charset="0"/>
                 <a:ea typeface="Calibri" panose="020F0502020204030204" pitchFamily="34" charset="0"/>
                 <a:cs typeface="Times New Roman" panose="02020603050405020304" pitchFamily="18" charset="0"/>
               </a:rPr>
@@ -3943,7 +3954,6 @@
             </a:r>
             <a:endParaRPr lang="it-IT" sz="2800" dirty="0">
               <a:effectLst/>
-              <a:latin typeface="Calibri" panose="020F0502020204030204" pitchFamily="34" charset="0"/>
               <a:ea typeface="Calibri" panose="020F0502020204030204" pitchFamily="34" charset="0"/>
               <a:cs typeface="Times New Roman" panose="02020603050405020304" pitchFamily="18" charset="0"/>
             </a:endParaRPr>
@@ -4089,7 +4099,6 @@
             <a:r>
               <a:rPr lang="en-US" sz="2800" dirty="0">
                 <a:effectLst/>
-                <a:latin typeface="Palatino Linotype" panose="02040502050505030304" pitchFamily="18" charset="0"/>
                 <a:ea typeface="Calibri" panose="020F0502020204030204" pitchFamily="34" charset="0"/>
                 <a:cs typeface="Times New Roman" panose="02020603050405020304" pitchFamily="18" charset="0"/>
               </a:rPr>
@@ -4098,7 +4107,6 @@
             <a:r>
               <a:rPr lang="en-US" sz="2800" dirty="0" err="1">
                 <a:effectLst/>
-                <a:latin typeface="Palatino Linotype" panose="02040502050505030304" pitchFamily="18" charset="0"/>
                 <a:ea typeface="Calibri" panose="020F0502020204030204" pitchFamily="34" charset="0"/>
                 <a:cs typeface="Times New Roman" panose="02020603050405020304" pitchFamily="18" charset="0"/>
               </a:rPr>
@@ -4107,7 +4115,6 @@
             <a:r>
               <a:rPr lang="en-US" sz="2800" dirty="0">
                 <a:effectLst/>
-                <a:latin typeface="Palatino Linotype" panose="02040502050505030304" pitchFamily="18" charset="0"/>
                 <a:ea typeface="Calibri" panose="020F0502020204030204" pitchFamily="34" charset="0"/>
                 <a:cs typeface="Times New Roman" panose="02020603050405020304" pitchFamily="18" charset="0"/>
               </a:rPr>
@@ -4180,7 +4187,7 @@
                 <a:solidFill>
                   <a:srgbClr val="00B050"/>
                 </a:solidFill>
-                <a:latin typeface="Palatino Linotype" panose="02040502050505030304" pitchFamily="18" charset="0"/>
+                <a:latin typeface="Aptos" panose="020B0004020202020204" pitchFamily="34" charset="0"/>
               </a:rPr>
               <a:t>TRUE</a:t>
             </a:r>
@@ -4188,7 +4195,7 @@
               <a:solidFill>
                 <a:srgbClr val="00B050"/>
               </a:solidFill>
-              <a:latin typeface="Palatino Linotype" panose="02040502050505030304" pitchFamily="18" charset="0"/>
+              <a:latin typeface="Aptos" panose="020B0004020202020204" pitchFamily="34" charset="0"/>
             </a:endParaRPr>
           </a:p>
         </p:txBody>
@@ -4375,7 +4382,6 @@
             <a:r>
               <a:rPr lang="en-US" sz="2800" dirty="0">
                 <a:effectLst/>
-                <a:latin typeface="Palatino Linotype" panose="02040502050505030304" pitchFamily="18" charset="0"/>
                 <a:ea typeface="Calibri" panose="020F0502020204030204" pitchFamily="34" charset="0"/>
                 <a:cs typeface="Times New Roman" panose="02020603050405020304" pitchFamily="18" charset="0"/>
               </a:rPr>
@@ -4448,7 +4454,7 @@
                 <a:solidFill>
                   <a:srgbClr val="FF0000"/>
                 </a:solidFill>
-                <a:latin typeface="Palatino Linotype" panose="02040502050505030304" pitchFamily="18" charset="0"/>
+                <a:latin typeface="Aptos" panose="020B0004020202020204" pitchFamily="34" charset="0"/>
               </a:rPr>
               <a:t>FALSE</a:t>
             </a:r>
@@ -4456,7 +4462,7 @@
               <a:solidFill>
                 <a:srgbClr val="FF0000"/>
               </a:solidFill>
-              <a:latin typeface="Palatino Linotype" panose="02040502050505030304" pitchFamily="18" charset="0"/>
+              <a:latin typeface="Aptos" panose="020B0004020202020204" pitchFamily="34" charset="0"/>
             </a:endParaRPr>
           </a:p>
         </p:txBody>
@@ -4640,7 +4646,6 @@
             <a:r>
               <a:rPr lang="en-US" dirty="0">
                 <a:effectLst/>
-                <a:latin typeface="Palatino Linotype" panose="02040502050505030304" pitchFamily="18" charset="0"/>
                 <a:ea typeface="Calibri" panose="020F0502020204030204" pitchFamily="34" charset="0"/>
                 <a:cs typeface="Times New Roman" panose="02020603050405020304" pitchFamily="18" charset="0"/>
               </a:rPr>
@@ -4917,27 +4922,39 @@
           </a:lstStyle>
           <a:p>
             <a:r>
-              <a:rPr lang="it-IT" dirty="0" err="1"/>
+              <a:rPr lang="it-IT" dirty="0" err="1">
+                <a:latin typeface="Aptos" panose="020B0004020202020204" pitchFamily="34" charset="0"/>
+              </a:rPr>
               <a:t>Calculate</a:t>
             </a:r>
             <a:r>
-              <a:rPr lang="it-IT" dirty="0"/>
+              <a:rPr lang="it-IT" dirty="0">
+                <a:latin typeface="Aptos" panose="020B0004020202020204" pitchFamily="34" charset="0"/>
+              </a:rPr>
               <a:t> the confidence </a:t>
             </a:r>
             <a:r>
-              <a:rPr lang="it-IT" dirty="0" err="1"/>
+              <a:rPr lang="it-IT" dirty="0" err="1">
+                <a:latin typeface="Aptos" panose="020B0004020202020204" pitchFamily="34" charset="0"/>
+              </a:rPr>
               <a:t>interval</a:t>
             </a:r>
             <a:r>
-              <a:rPr lang="it-IT" dirty="0"/>
+              <a:rPr lang="it-IT" dirty="0">
+                <a:latin typeface="Aptos" panose="020B0004020202020204" pitchFamily="34" charset="0"/>
+              </a:rPr>
               <a:t> </a:t>
             </a:r>
             <a:r>
-              <a:rPr lang="it-IT" dirty="0" err="1"/>
+              <a:rPr lang="it-IT" dirty="0" err="1">
+                <a:latin typeface="Aptos" panose="020B0004020202020204" pitchFamily="34" charset="0"/>
+              </a:rPr>
               <a:t>at</a:t>
             </a:r>
             <a:r>
-              <a:rPr lang="it-IT" dirty="0"/>
+              <a:rPr lang="it-IT" dirty="0">
+                <a:latin typeface="Aptos" panose="020B0004020202020204" pitchFamily="34" charset="0"/>
+              </a:rPr>
               <a:t> 90% : </a:t>
             </a:r>
             <a:r>
@@ -4945,49 +4962,70 @@
                 <a:solidFill>
                   <a:srgbClr val="00B050"/>
                 </a:solidFill>
+                <a:latin typeface="Aptos" panose="020B0004020202020204" pitchFamily="34" charset="0"/>
               </a:rPr>
               <a:t>74 ± 14.25</a:t>
             </a:r>
           </a:p>
           <a:p>
             <a:r>
-              <a:rPr lang="it-IT" dirty="0" err="1"/>
+              <a:rPr lang="it-IT" dirty="0" err="1">
+                <a:latin typeface="Aptos" panose="020B0004020202020204" pitchFamily="34" charset="0"/>
+              </a:rPr>
               <a:t>Evaluate</a:t>
             </a:r>
             <a:r>
-              <a:rPr lang="it-IT" dirty="0"/>
+              <a:rPr lang="it-IT" dirty="0">
+                <a:latin typeface="Aptos" panose="020B0004020202020204" pitchFamily="34" charset="0"/>
+              </a:rPr>
               <a:t> </a:t>
             </a:r>
             <a:r>
-              <a:rPr lang="it-IT" dirty="0" err="1"/>
+              <a:rPr lang="it-IT" dirty="0" err="1">
+                <a:latin typeface="Aptos" panose="020B0004020202020204" pitchFamily="34" charset="0"/>
+              </a:rPr>
               <a:t>if</a:t>
             </a:r>
             <a:r>
-              <a:rPr lang="it-IT" dirty="0"/>
+              <a:rPr lang="it-IT" dirty="0">
+                <a:latin typeface="Aptos" panose="020B0004020202020204" pitchFamily="34" charset="0"/>
+              </a:rPr>
               <a:t> an app B (</a:t>
             </a:r>
             <a:r>
-              <a:rPr lang="it-IT" dirty="0" err="1"/>
+              <a:rPr lang="it-IT" dirty="0" err="1">
+                <a:latin typeface="Aptos" panose="020B0004020202020204" pitchFamily="34" charset="0"/>
+              </a:rPr>
               <a:t>evaluated</a:t>
             </a:r>
             <a:r>
-              <a:rPr lang="it-IT" dirty="0"/>
+              <a:rPr lang="it-IT" dirty="0">
+                <a:latin typeface="Aptos" panose="020B0004020202020204" pitchFamily="34" charset="0"/>
+              </a:rPr>
               <a:t> by the </a:t>
             </a:r>
             <a:r>
-              <a:rPr lang="it-IT" dirty="0" err="1"/>
+              <a:rPr lang="it-IT" dirty="0" err="1">
+                <a:latin typeface="Aptos" panose="020B0004020202020204" pitchFamily="34" charset="0"/>
+              </a:rPr>
               <a:t>same</a:t>
             </a:r>
             <a:r>
-              <a:rPr lang="it-IT" dirty="0"/>
+              <a:rPr lang="it-IT" dirty="0">
+                <a:latin typeface="Aptos" panose="020B0004020202020204" pitchFamily="34" charset="0"/>
+              </a:rPr>
               <a:t> 5 </a:t>
             </a:r>
             <a:r>
-              <a:rPr lang="it-IT" dirty="0" err="1"/>
+              <a:rPr lang="it-IT" dirty="0" err="1">
+                <a:latin typeface="Aptos" panose="020B0004020202020204" pitchFamily="34" charset="0"/>
+              </a:rPr>
               <a:t>participants</a:t>
             </a:r>
             <a:r>
-              <a:rPr lang="it-IT" dirty="0"/>
+              <a:rPr lang="it-IT" dirty="0">
+                <a:latin typeface="Aptos" panose="020B0004020202020204" pitchFamily="34" charset="0"/>
+              </a:rPr>
               <a:t>) with SUS:</a:t>
             </a:r>
           </a:p>
@@ -4997,23 +5035,28 @@
             </a:pPr>
             <a:r>
               <a:rPr lang="en-US" dirty="0">
+                <a:latin typeface="Aptos" panose="020B0004020202020204" pitchFamily="34" charset="0"/>
                 <a:cs typeface="Times New Roman" panose="02020603050405020304" pitchFamily="18" charset="0"/>
               </a:rPr>
               <a:t>	SUS</a:t>
             </a:r>
             <a:r>
               <a:rPr lang="en-US" baseline="-25000" dirty="0">
+                <a:latin typeface="Aptos" panose="020B0004020202020204" pitchFamily="34" charset="0"/>
                 <a:cs typeface="Times New Roman" panose="02020603050405020304" pitchFamily="18" charset="0"/>
               </a:rPr>
               <a:t>B</a:t>
             </a:r>
             <a:r>
               <a:rPr lang="en-US" dirty="0">
+                <a:latin typeface="Aptos" panose="020B0004020202020204" pitchFamily="34" charset="0"/>
                 <a:cs typeface="Times New Roman" panose="02020603050405020304" pitchFamily="18" charset="0"/>
               </a:rPr>
               <a:t> = 90, 90, 87, 95, 91</a:t>
             </a:r>
-            <a:endParaRPr lang="it-IT" dirty="0"/>
+            <a:endParaRPr lang="it-IT" dirty="0">
+              <a:latin typeface="Aptos" panose="020B0004020202020204" pitchFamily="34" charset="0"/>
+            </a:endParaRPr>
           </a:p>
           <a:p>
             <a:pPr marL="0" indent="0">
@@ -5021,6 +5064,7 @@
             </a:pPr>
             <a:r>
               <a:rPr lang="en-US" dirty="0">
+                <a:latin typeface="Aptos" panose="020B0004020202020204" pitchFamily="34" charset="0"/>
                 <a:cs typeface="Times New Roman" panose="02020603050405020304" pitchFamily="18" charset="0"/>
               </a:rPr>
               <a:t>can be said to be significantly more usable with a level of confidence &gt;= 0.05: </a:t>
@@ -5032,6 +5076,7 @@
             </a:pPr>
             <a:r>
               <a:rPr lang="en-US" dirty="0">
+                <a:latin typeface="Aptos" panose="020B0004020202020204" pitchFamily="34" charset="0"/>
                 <a:cs typeface="Times New Roman" panose="02020603050405020304" pitchFamily="18" charset="0"/>
               </a:rPr>
               <a:t>	</a:t>
@@ -5041,6 +5086,7 @@
                 <a:solidFill>
                   <a:srgbClr val="00B050"/>
                 </a:solidFill>
+                <a:latin typeface="Aptos" panose="020B0004020202020204" pitchFamily="34" charset="0"/>
                 <a:cs typeface="Times New Roman" panose="02020603050405020304" pitchFamily="18" charset="0"/>
               </a:rPr>
               <a:t>t = 2.30 </a:t>
@@ -5050,6 +5096,7 @@
                 <a:solidFill>
                   <a:srgbClr val="00B050"/>
                 </a:solidFill>
+                <a:latin typeface="Aptos" panose="020B0004020202020204" pitchFamily="34" charset="0"/>
                 <a:cs typeface="Times New Roman" panose="02020603050405020304" pitchFamily="18" charset="0"/>
                 <a:sym typeface="Wingdings" pitchFamily="2" charset="2"/>
               </a:rPr>
@@ -5059,6 +5106,7 @@
               <a:solidFill>
                 <a:srgbClr val="00B050"/>
               </a:solidFill>
+              <a:latin typeface="Aptos" panose="020B0004020202020204" pitchFamily="34" charset="0"/>
               <a:cs typeface="Times New Roman" panose="02020603050405020304" pitchFamily="18" charset="0"/>
             </a:endParaRPr>
           </a:p>
@@ -5067,6 +5115,7 @@
               <a:buNone/>
             </a:pPr>
             <a:endParaRPr lang="en-US" dirty="0">
+              <a:latin typeface="Aptos" panose="020B0004020202020204" pitchFamily="34" charset="0"/>
               <a:cs typeface="Times New Roman" panose="02020603050405020304" pitchFamily="18" charset="0"/>
             </a:endParaRPr>
           </a:p>
@@ -5075,6 +5124,7 @@
               <a:buNone/>
             </a:pPr>
             <a:endParaRPr lang="en-US" dirty="0">
+              <a:latin typeface="Aptos" panose="020B0004020202020204" pitchFamily="34" charset="0"/>
               <a:cs typeface="Times New Roman" panose="02020603050405020304" pitchFamily="18" charset="0"/>
             </a:endParaRPr>
           </a:p>
@@ -5208,7 +5258,6 @@
             <a:r>
               <a:rPr lang="en-US" dirty="0">
                 <a:effectLst/>
-                <a:latin typeface="Palatino Linotype" panose="02040502050505030304" pitchFamily="18" charset="0"/>
                 <a:ea typeface="Calibri" panose="020F0502020204030204" pitchFamily="34" charset="0"/>
                 <a:cs typeface="Times New Roman" panose="02020603050405020304" pitchFamily="18" charset="0"/>
               </a:rPr>
@@ -5216,7 +5265,6 @@
             </a:r>
             <a:endParaRPr lang="it-IT" dirty="0">
               <a:effectLst/>
-              <a:latin typeface="Calibri" panose="020F0502020204030204" pitchFamily="34" charset="0"/>
               <a:ea typeface="Calibri" panose="020F0502020204030204" pitchFamily="34" charset="0"/>
               <a:cs typeface="Times New Roman" panose="02020603050405020304" pitchFamily="18" charset="0"/>
             </a:endParaRPr>
@@ -5467,6 +5515,7 @@
             </a:pPr>
             <a:r>
               <a:rPr lang="en-US" u="sng" dirty="0">
+                <a:latin typeface="Aptos" panose="020B0004020202020204" pitchFamily="34" charset="0"/>
                 <a:ea typeface="Calibri" panose="020F0502020204030204" pitchFamily="34" charset="0"/>
                 <a:cs typeface="Times New Roman" panose="02020603050405020304" pitchFamily="18" charset="0"/>
               </a:rPr>
@@ -5476,16 +5525,20 @@
           <a:p>
             <a:r>
               <a:rPr lang="en-US" dirty="0">
+                <a:latin typeface="Aptos" panose="020B0004020202020204" pitchFamily="34" charset="0"/>
                 <a:ea typeface="Calibri" panose="020F0502020204030204" pitchFamily="34" charset="0"/>
                 <a:cs typeface="Times New Roman" panose="02020603050405020304" pitchFamily="18" charset="0"/>
               </a:rPr>
               <a:t>GET: </a:t>
             </a:r>
             <a:r>
-              <a:rPr lang="en-US" dirty="0"/>
+              <a:rPr lang="en-US" dirty="0">
+                <a:latin typeface="Aptos" panose="020B0004020202020204" pitchFamily="34" charset="0"/>
+              </a:rPr>
               <a:t>Method used to request the server to send a page or an object. It only retrieves data.</a:t>
             </a:r>
             <a:endParaRPr lang="en-US" dirty="0">
+              <a:latin typeface="Aptos" panose="020B0004020202020204" pitchFamily="34" charset="0"/>
               <a:ea typeface="Calibri" panose="020F0502020204030204" pitchFamily="34" charset="0"/>
               <a:cs typeface="Times New Roman" panose="02020603050405020304" pitchFamily="18" charset="0"/>
             </a:endParaRPr>
@@ -5493,16 +5546,20 @@
           <a:p>
             <a:r>
               <a:rPr lang="en-US" dirty="0">
+                <a:latin typeface="Aptos" panose="020B0004020202020204" pitchFamily="34" charset="0"/>
                 <a:ea typeface="Calibri" panose="020F0502020204030204" pitchFamily="34" charset="0"/>
                 <a:cs typeface="Times New Roman" panose="02020603050405020304" pitchFamily="18" charset="0"/>
               </a:rPr>
               <a:t>HEAD: </a:t>
             </a:r>
             <a:r>
-              <a:rPr lang="en-GB" dirty="0"/>
+              <a:rPr lang="en-GB" dirty="0">
+                <a:latin typeface="Aptos" panose="020B0004020202020204" pitchFamily="34" charset="0"/>
+              </a:rPr>
               <a:t>Method used to ask for the response message header, without requesting the actual page content. </a:t>
             </a:r>
             <a:endParaRPr lang="en-US" dirty="0">
+              <a:latin typeface="Aptos" panose="020B0004020202020204" pitchFamily="34" charset="0"/>
               <a:ea typeface="Calibri" panose="020F0502020204030204" pitchFamily="34" charset="0"/>
               <a:cs typeface="Times New Roman" panose="02020603050405020304" pitchFamily="18" charset="0"/>
             </a:endParaRPr>
@@ -5510,36 +5567,50 @@
           <a:p>
             <a:r>
               <a:rPr lang="en-US" dirty="0">
+                <a:latin typeface="Aptos" panose="020B0004020202020204" pitchFamily="34" charset="0"/>
                 <a:ea typeface="Calibri" panose="020F0502020204030204" pitchFamily="34" charset="0"/>
                 <a:cs typeface="Times New Roman" panose="02020603050405020304" pitchFamily="18" charset="0"/>
               </a:rPr>
               <a:t>POST: </a:t>
             </a:r>
             <a:r>
-              <a:rPr lang="it-IT" dirty="0"/>
+              <a:rPr lang="it-IT" dirty="0">
+                <a:latin typeface="Aptos" panose="020B0004020202020204" pitchFamily="34" charset="0"/>
+              </a:rPr>
               <a:t>Method </a:t>
             </a:r>
             <a:r>
-              <a:rPr lang="it-IT" dirty="0" err="1"/>
+              <a:rPr lang="it-IT" dirty="0" err="1">
+                <a:latin typeface="Aptos" panose="020B0004020202020204" pitchFamily="34" charset="0"/>
+              </a:rPr>
               <a:t>used</a:t>
             </a:r>
             <a:r>
-              <a:rPr lang="it-IT" dirty="0"/>
+              <a:rPr lang="it-IT" dirty="0">
+                <a:latin typeface="Aptos" panose="020B0004020202020204" pitchFamily="34" charset="0"/>
+              </a:rPr>
               <a:t> to </a:t>
             </a:r>
             <a:r>
-              <a:rPr lang="it-IT" dirty="0" err="1"/>
+              <a:rPr lang="it-IT" dirty="0" err="1">
+                <a:latin typeface="Aptos" panose="020B0004020202020204" pitchFamily="34" charset="0"/>
+              </a:rPr>
               <a:t>ask</a:t>
             </a:r>
             <a:r>
-              <a:rPr lang="it-IT" dirty="0"/>
+              <a:rPr lang="it-IT" dirty="0">
+                <a:latin typeface="Aptos" panose="020B0004020202020204" pitchFamily="34" charset="0"/>
+              </a:rPr>
               <a:t> to upload data to a server. With POST </a:t>
             </a:r>
             <a:r>
-              <a:rPr lang="en-US" dirty="0"/>
+              <a:rPr lang="en-US" dirty="0">
+                <a:latin typeface="Aptos" panose="020B0004020202020204" pitchFamily="34" charset="0"/>
+              </a:rPr>
               <a:t>the client asks to the server to accept the entity enclosed in the request as a new subordinate of the resource identified by the request URL.</a:t>
             </a:r>
             <a:endParaRPr lang="en-US" dirty="0">
+              <a:latin typeface="Aptos" panose="020B0004020202020204" pitchFamily="34" charset="0"/>
               <a:ea typeface="Calibri" panose="020F0502020204030204" pitchFamily="34" charset="0"/>
               <a:cs typeface="Times New Roman" panose="02020603050405020304" pitchFamily="18" charset="0"/>
             </a:endParaRPr>
@@ -5547,16 +5618,20 @@
           <a:p>
             <a:r>
               <a:rPr lang="en-US" dirty="0">
+                <a:latin typeface="Aptos" panose="020B0004020202020204" pitchFamily="34" charset="0"/>
                 <a:ea typeface="Calibri" panose="020F0502020204030204" pitchFamily="34" charset="0"/>
                 <a:cs typeface="Times New Roman" panose="02020603050405020304" pitchFamily="18" charset="0"/>
               </a:rPr>
               <a:t>PUT: Method used to </a:t>
             </a:r>
             <a:r>
-              <a:rPr lang="en-US" dirty="0"/>
+              <a:rPr lang="en-US" dirty="0">
+                <a:latin typeface="Aptos" panose="020B0004020202020204" pitchFamily="34" charset="0"/>
+              </a:rPr>
               <a:t>ask to write a content in the server to the specified URL. If the request URL refers to an already existing resource, the server replaces the existing entity with the new enclosed entity. </a:t>
             </a:r>
             <a:endParaRPr lang="en-US" dirty="0">
+              <a:latin typeface="Aptos" panose="020B0004020202020204" pitchFamily="34" charset="0"/>
               <a:ea typeface="Calibri" panose="020F0502020204030204" pitchFamily="34" charset="0"/>
               <a:cs typeface="Times New Roman" panose="02020603050405020304" pitchFamily="18" charset="0"/>
             </a:endParaRPr>
@@ -5564,25 +5639,30 @@
           <a:p>
             <a:r>
               <a:rPr lang="en-US" dirty="0">
+                <a:latin typeface="Aptos" panose="020B0004020202020204" pitchFamily="34" charset="0"/>
                 <a:ea typeface="Calibri" panose="020F0502020204030204" pitchFamily="34" charset="0"/>
                 <a:cs typeface="Times New Roman" panose="02020603050405020304" pitchFamily="18" charset="0"/>
               </a:rPr>
               <a:t>DELETE: Method used to </a:t>
             </a:r>
             <a:r>
-              <a:rPr lang="en-US" dirty="0"/>
+              <a:rPr lang="en-US" dirty="0">
+                <a:latin typeface="Aptos" panose="020B0004020202020204" pitchFamily="34" charset="0"/>
+              </a:rPr>
               <a:t>ask to delete the content in the server at the specified URL.</a:t>
             </a:r>
           </a:p>
           <a:p>
             <a:endParaRPr lang="it-IT" dirty="0">
-              <a:latin typeface="Calibri" panose="020F0502020204030204" pitchFamily="34" charset="0"/>
+              <a:latin typeface="Aptos" panose="020B0004020202020204" pitchFamily="34" charset="0"/>
               <a:ea typeface="Calibri" panose="020F0502020204030204" pitchFamily="34" charset="0"/>
               <a:cs typeface="Times New Roman" panose="02020603050405020304" pitchFamily="18" charset="0"/>
             </a:endParaRPr>
           </a:p>
           <a:p>
-            <a:endParaRPr lang="it-IT" dirty="0"/>
+            <a:endParaRPr lang="it-IT" dirty="0">
+              <a:latin typeface="Aptos" panose="020B0004020202020204" pitchFamily="34" charset="0"/>
+            </a:endParaRPr>
           </a:p>
         </p:txBody>
       </p:sp>
@@ -5765,7 +5845,6 @@
             <a:r>
               <a:rPr lang="en-US" dirty="0">
                 <a:effectLst/>
-                <a:latin typeface="Palatino Linotype" panose="02040502050505030304" pitchFamily="18" charset="0"/>
                 <a:ea typeface="Calibri" panose="020F0502020204030204" pitchFamily="34" charset="0"/>
                 <a:cs typeface="Times New Roman" panose="02020603050405020304" pitchFamily="18" charset="0"/>
               </a:rPr>
@@ -5773,7 +5852,6 @@
             </a:r>
             <a:endParaRPr lang="it-IT" dirty="0">
               <a:effectLst/>
-              <a:latin typeface="Calibri" panose="020F0502020204030204" pitchFamily="34" charset="0"/>
               <a:ea typeface="Calibri" panose="020F0502020204030204" pitchFamily="34" charset="0"/>
               <a:cs typeface="Times New Roman" panose="02020603050405020304" pitchFamily="18" charset="0"/>
             </a:endParaRPr>
@@ -5876,7 +5954,7 @@
                 <a:effectLst/>
                 <a:uLnTx/>
                 <a:uFillTx/>
-                <a:latin typeface="Palatino Linotype" panose="02040502050505030304" pitchFamily="18" charset="0"/>
+                <a:latin typeface="Aptos" panose="020B0004020202020204" pitchFamily="34" charset="0"/>
                 <a:ea typeface="Calibri" panose="020F0502020204030204" pitchFamily="34" charset="0"/>
                 <a:cs typeface="Times New Roman" panose="02020603050405020304" pitchFamily="18" charset="0"/>
               </a:rPr>
@@ -5902,7 +5980,7 @@
             </a:pPr>
             <a:r>
               <a:rPr lang="en-GB" sz="2000" dirty="0">
-                <a:latin typeface="Palatino Linotype" panose="02040502050505030304" pitchFamily="18" charset="0"/>
+                <a:latin typeface="Aptos" panose="020B0004020202020204" pitchFamily="34" charset="0"/>
               </a:rPr>
               <a:t>Lawfulness, fairness and transparency: Personal data shall be processed lawfully, fairly and in a transparent manner in relation to the data subject.  </a:t>
             </a:r>
@@ -5926,7 +6004,7 @@
             </a:pPr>
             <a:r>
               <a:rPr lang="en-GB" sz="2000" dirty="0">
-                <a:latin typeface="Palatino Linotype" panose="02040502050505030304" pitchFamily="18" charset="0"/>
+                <a:latin typeface="Aptos" panose="020B0004020202020204" pitchFamily="34" charset="0"/>
               </a:rPr>
               <a:t>Purpose limitation: Personal data shall be collected for specified, explicit and legitimate purposes and not further processed in a manner that is incompatible with those purposes.</a:t>
             </a:r>
@@ -5950,7 +6028,7 @@
             </a:pPr>
             <a:r>
               <a:rPr lang="en-GB" sz="2000" dirty="0">
-                <a:latin typeface="Palatino Linotype" panose="02040502050505030304" pitchFamily="18" charset="0"/>
+                <a:latin typeface="Aptos" panose="020B0004020202020204" pitchFamily="34" charset="0"/>
               </a:rPr>
               <a:t>Data minimisation: Personal data shall be adequate, relevant and limited to what is necessary in relation to the purposes for which they are processed.</a:t>
             </a:r>
@@ -5974,7 +6052,7 @@
             </a:pPr>
             <a:r>
               <a:rPr lang="en-GB" sz="2000" dirty="0">
-                <a:latin typeface="Palatino Linotype" panose="02040502050505030304" pitchFamily="18" charset="0"/>
+                <a:latin typeface="Aptos" panose="020B0004020202020204" pitchFamily="34" charset="0"/>
               </a:rPr>
               <a:t>Accuracy: personal data must be accurate and, where necessary, kept up to date. </a:t>
             </a:r>
@@ -5998,7 +6076,7 @@
             </a:pPr>
             <a:r>
               <a:rPr lang="en-GB" sz="2000" dirty="0">
-                <a:latin typeface="Palatino Linotype" panose="02040502050505030304" pitchFamily="18" charset="0"/>
+                <a:latin typeface="Aptos" panose="020B0004020202020204" pitchFamily="34" charset="0"/>
               </a:rPr>
               <a:t>Storage limitation: personal data shall be stored in a form which permits identification of data subjects for no longer than is necessary for the purposes for which they are processed. </a:t>
             </a:r>
@@ -6033,7 +6111,7 @@
               <a:effectLst/>
               <a:uLnTx/>
               <a:uFillTx/>
-              <a:latin typeface="Palatino Linotype" panose="02040502050505030304" pitchFamily="18" charset="0"/>
+              <a:latin typeface="Aptos" panose="020B0004020202020204" pitchFamily="34" charset="0"/>
               <a:ea typeface="Calibri" panose="020F0502020204030204" pitchFamily="34" charset="0"/>
               <a:cs typeface="Times New Roman" panose="02020603050405020304" pitchFamily="18" charset="0"/>
             </a:endParaRPr>
@@ -6424,7 +6502,7 @@
             </a:r>
             <a:r>
               <a:rPr lang="en-GB" b="1" dirty="0"/>
-              <a:t>14/07/2024</a:t>
+              <a:t>13/07/2025</a:t>
             </a:r>
             <a:r>
               <a:rPr lang="en-GB" dirty="0"/>
@@ -6536,15 +6614,15 @@
           <a:p>
             <a:r>
               <a:rPr lang="en-GB" dirty="0"/>
-              <a:t>”I belong to Group 50 composed by me, Martina Vettoretti, and Luca </a:t>
+              <a:t>”I belong to Group 50 composed by me, Martina </a:t>
             </a:r>
             <a:r>
               <a:rPr lang="en-GB" dirty="0" err="1"/>
-              <a:t>Cossu</a:t>
+              <a:t>Vettoretti</a:t>
             </a:r>
             <a:r>
               <a:rPr lang="en-GB" dirty="0"/>
-              <a:t>”</a:t>
+              <a:t>, and Luca Cossu”</a:t>
             </a:r>
           </a:p>
           <a:p>
@@ -9684,7 +9762,6 @@
             <a:r>
               <a:rPr lang="fr-FR" dirty="0" err="1">
                 <a:effectLst/>
-                <a:latin typeface="Palatino Linotype" panose="02040502050505030304" pitchFamily="18" charset="0"/>
                 <a:ea typeface="Calibri" panose="020F0502020204030204" pitchFamily="34" charset="0"/>
                 <a:cs typeface="Times New Roman" panose="02020603050405020304" pitchFamily="18" charset="0"/>
               </a:rPr>
@@ -9693,7 +9770,6 @@
             <a:r>
               <a:rPr lang="fr-FR" dirty="0">
                 <a:effectLst/>
-                <a:latin typeface="Palatino Linotype" panose="02040502050505030304" pitchFamily="18" charset="0"/>
                 <a:ea typeface="Calibri" panose="020F0502020204030204" pitchFamily="34" charset="0"/>
                 <a:cs typeface="Times New Roman" panose="02020603050405020304" pitchFamily="18" charset="0"/>
               </a:rPr>
@@ -9704,7 +9780,6 @@
             <a:r>
               <a:rPr lang="fr-FR" dirty="0">
                 <a:effectLst/>
-                <a:latin typeface="Palatino Linotype" panose="02040502050505030304" pitchFamily="18" charset="0"/>
                 <a:ea typeface="Calibri" panose="020F0502020204030204" pitchFamily="34" charset="0"/>
                 <a:cs typeface="Times New Roman" panose="02020603050405020304" pitchFamily="18" charset="0"/>
               </a:rPr>
@@ -9713,7 +9788,6 @@
             <a:r>
               <a:rPr lang="fr-FR" dirty="0" err="1">
                 <a:effectLst/>
-                <a:latin typeface="Palatino Linotype" panose="02040502050505030304" pitchFamily="18" charset="0"/>
                 <a:ea typeface="Calibri" panose="020F0502020204030204" pitchFamily="34" charset="0"/>
                 <a:cs typeface="Times New Roman" panose="02020603050405020304" pitchFamily="18" charset="0"/>
               </a:rPr>
@@ -9722,7 +9796,6 @@
             <a:r>
               <a:rPr lang="fr-FR" dirty="0">
                 <a:effectLst/>
-                <a:latin typeface="Palatino Linotype" panose="02040502050505030304" pitchFamily="18" charset="0"/>
                 <a:ea typeface="Calibri" panose="020F0502020204030204" pitchFamily="34" charset="0"/>
                 <a:cs typeface="Times New Roman" panose="02020603050405020304" pitchFamily="18" charset="0"/>
               </a:rPr>
@@ -9731,7 +9804,6 @@
             <a:r>
               <a:rPr lang="fr-FR" dirty="0" err="1">
                 <a:effectLst/>
-                <a:latin typeface="Palatino Linotype" panose="02040502050505030304" pitchFamily="18" charset="0"/>
                 <a:ea typeface="Calibri" panose="020F0502020204030204" pitchFamily="34" charset="0"/>
                 <a:cs typeface="Times New Roman" panose="02020603050405020304" pitchFamily="18" charset="0"/>
               </a:rPr>
@@ -9740,7 +9812,6 @@
             <a:r>
               <a:rPr lang="fr-FR" dirty="0">
                 <a:effectLst/>
-                <a:latin typeface="Palatino Linotype" panose="02040502050505030304" pitchFamily="18" charset="0"/>
                 <a:ea typeface="Calibri" panose="020F0502020204030204" pitchFamily="34" charset="0"/>
                 <a:cs typeface="Times New Roman" panose="02020603050405020304" pitchFamily="18" charset="0"/>
               </a:rPr>
@@ -9748,7 +9819,6 @@
             </a:r>
             <a:endParaRPr lang="it-IT" dirty="0">
               <a:effectLst/>
-              <a:latin typeface="Calibri" panose="020F0502020204030204" pitchFamily="34" charset="0"/>
               <a:ea typeface="Calibri" panose="020F0502020204030204" pitchFamily="34" charset="0"/>
               <a:cs typeface="Times New Roman" panose="02020603050405020304" pitchFamily="18" charset="0"/>
             </a:endParaRPr>
@@ -9757,7 +9827,6 @@
             <a:r>
               <a:rPr lang="fr-FR" dirty="0">
                 <a:effectLst/>
-                <a:latin typeface="Palatino Linotype" panose="02040502050505030304" pitchFamily="18" charset="0"/>
                 <a:ea typeface="Calibri" panose="020F0502020204030204" pitchFamily="34" charset="0"/>
                 <a:cs typeface="Times New Roman" panose="02020603050405020304" pitchFamily="18" charset="0"/>
               </a:rPr>
@@ -9766,7 +9835,6 @@
             <a:r>
               <a:rPr lang="fr-FR" dirty="0" err="1">
                 <a:effectLst/>
-                <a:latin typeface="Palatino Linotype" panose="02040502050505030304" pitchFamily="18" charset="0"/>
                 <a:ea typeface="Calibri" panose="020F0502020204030204" pitchFamily="34" charset="0"/>
                 <a:cs typeface="Times New Roman" panose="02020603050405020304" pitchFamily="18" charset="0"/>
               </a:rPr>
@@ -9775,7 +9843,6 @@
             <a:r>
               <a:rPr lang="fr-FR" dirty="0">
                 <a:effectLst/>
-                <a:latin typeface="Palatino Linotype" panose="02040502050505030304" pitchFamily="18" charset="0"/>
                 <a:ea typeface="Calibri" panose="020F0502020204030204" pitchFamily="34" charset="0"/>
                 <a:cs typeface="Times New Roman" panose="02020603050405020304" pitchFamily="18" charset="0"/>
               </a:rPr>
@@ -9783,7 +9850,6 @@
             </a:r>
             <a:endParaRPr lang="it-IT" dirty="0">
               <a:effectLst/>
-              <a:latin typeface="Calibri" panose="020F0502020204030204" pitchFamily="34" charset="0"/>
               <a:ea typeface="Calibri" panose="020F0502020204030204" pitchFamily="34" charset="0"/>
               <a:cs typeface="Times New Roman" panose="02020603050405020304" pitchFamily="18" charset="0"/>
             </a:endParaRPr>
@@ -9792,7 +9858,6 @@
             <a:r>
               <a:rPr lang="en-US" dirty="0">
                 <a:effectLst/>
-                <a:latin typeface="Palatino Linotype" panose="02040502050505030304" pitchFamily="18" charset="0"/>
                 <a:ea typeface="Calibri" panose="020F0502020204030204" pitchFamily="34" charset="0"/>
                 <a:cs typeface="Times New Roman" panose="02020603050405020304" pitchFamily="18" charset="0"/>
               </a:rPr>
@@ -9802,7 +9867,6 @@
           <a:p>
             <a:endParaRPr lang="en-US" dirty="0">
               <a:effectLst/>
-              <a:latin typeface="Calibri" panose="020F0502020204030204" pitchFamily="34" charset="0"/>
               <a:ea typeface="Calibri" panose="020F0502020204030204" pitchFamily="34" charset="0"/>
               <a:cs typeface="Times New Roman" panose="02020603050405020304" pitchFamily="18" charset="0"/>
             </a:endParaRPr>
@@ -9871,7 +9935,6 @@
             </a:pPr>
             <a:endParaRPr lang="it-IT" dirty="0">
               <a:effectLst/>
-              <a:latin typeface="Calibri" panose="020F0502020204030204" pitchFamily="34" charset="0"/>
               <a:ea typeface="Calibri" panose="020F0502020204030204" pitchFamily="34" charset="0"/>
               <a:cs typeface="Times New Roman" panose="02020603050405020304" pitchFamily="18" charset="0"/>
             </a:endParaRPr>
@@ -9951,7 +10014,7 @@
             <a:pPr algn="ctr"/>
             <a:r>
               <a:rPr lang="en-US" sz="1400" b="1" dirty="0">
-                <a:latin typeface="Palatino Linotype" panose="02040502050505030304" pitchFamily="18" charset="0"/>
+                <a:latin typeface="Aptos" panose="020B0004020202020204" pitchFamily="34" charset="0"/>
                 <a:ea typeface="Palatino" pitchFamily="2" charset="77"/>
               </a:rPr>
               <a:t>BONUS</a:t>
@@ -10793,7 +10856,6 @@
             <a:r>
               <a:rPr lang="en-US" sz="2800" dirty="0">
                 <a:effectLst/>
-                <a:latin typeface="Palatino Linotype" panose="02040502050505030304" pitchFamily="18" charset="0"/>
                 <a:ea typeface="Calibri" panose="020F0502020204030204" pitchFamily="34" charset="0"/>
                 <a:cs typeface="Times New Roman" panose="02020603050405020304" pitchFamily="18" charset="0"/>
               </a:rPr>
@@ -10801,7 +10863,6 @@
             </a:r>
             <a:endParaRPr lang="it-IT" sz="2800" dirty="0">
               <a:effectLst/>
-              <a:latin typeface="Calibri" panose="020F0502020204030204" pitchFamily="34" charset="0"/>
               <a:ea typeface="Calibri" panose="020F0502020204030204" pitchFamily="34" charset="0"/>
               <a:cs typeface="Times New Roman" panose="02020603050405020304" pitchFamily="18" charset="0"/>
             </a:endParaRPr>
@@ -10814,7 +10875,6 @@
             <a:r>
               <a:rPr lang="en-US" sz="2800" dirty="0">
                 <a:effectLst/>
-                <a:latin typeface="Palatino Linotype" panose="02040502050505030304" pitchFamily="18" charset="0"/>
                 <a:ea typeface="Calibri" panose="020F0502020204030204" pitchFamily="34" charset="0"/>
                 <a:cs typeface="Times New Roman" panose="02020603050405020304" pitchFamily="18" charset="0"/>
               </a:rPr>
@@ -10822,7 +10882,6 @@
             </a:r>
             <a:endParaRPr lang="it-IT" sz="2800" dirty="0">
               <a:effectLst/>
-              <a:latin typeface="Calibri" panose="020F0502020204030204" pitchFamily="34" charset="0"/>
               <a:ea typeface="Calibri" panose="020F0502020204030204" pitchFamily="34" charset="0"/>
               <a:cs typeface="Times New Roman" panose="02020603050405020304" pitchFamily="18" charset="0"/>
             </a:endParaRPr>
@@ -10835,7 +10894,6 @@
             <a:r>
               <a:rPr lang="en-US" sz="2800" dirty="0">
                 <a:effectLst/>
-                <a:latin typeface="Palatino Linotype" panose="02040502050505030304" pitchFamily="18" charset="0"/>
                 <a:ea typeface="Calibri" panose="020F0502020204030204" pitchFamily="34" charset="0"/>
                 <a:cs typeface="Times New Roman" panose="02020603050405020304" pitchFamily="18" charset="0"/>
               </a:rPr>
@@ -10843,7 +10901,6 @@
             </a:r>
             <a:endParaRPr lang="it-IT" sz="2800" dirty="0">
               <a:effectLst/>
-              <a:latin typeface="Calibri" panose="020F0502020204030204" pitchFamily="34" charset="0"/>
               <a:ea typeface="Calibri" panose="020F0502020204030204" pitchFamily="34" charset="0"/>
               <a:cs typeface="Times New Roman" panose="02020603050405020304" pitchFamily="18" charset="0"/>
             </a:endParaRPr>
@@ -10856,7 +10913,6 @@
             <a:r>
               <a:rPr lang="en-US" sz="2800" dirty="0">
                 <a:effectLst/>
-                <a:latin typeface="Palatino Linotype" panose="02040502050505030304" pitchFamily="18" charset="0"/>
                 <a:ea typeface="Calibri" panose="020F0502020204030204" pitchFamily="34" charset="0"/>
                 <a:cs typeface="Times New Roman" panose="02020603050405020304" pitchFamily="18" charset="0"/>
               </a:rPr>
@@ -10864,7 +10920,6 @@
             </a:r>
             <a:endParaRPr lang="it-IT" sz="2800" dirty="0">
               <a:effectLst/>
-              <a:latin typeface="Calibri" panose="020F0502020204030204" pitchFamily="34" charset="0"/>
               <a:ea typeface="Calibri" panose="020F0502020204030204" pitchFamily="34" charset="0"/>
               <a:cs typeface="Times New Roman" panose="02020603050405020304" pitchFamily="18" charset="0"/>
             </a:endParaRPr>
@@ -10877,7 +10932,6 @@
             <a:r>
               <a:rPr lang="en-US" sz="2800" dirty="0">
                 <a:effectLst/>
-                <a:latin typeface="Palatino Linotype" panose="02040502050505030304" pitchFamily="18" charset="0"/>
                 <a:ea typeface="Calibri" panose="020F0502020204030204" pitchFamily="34" charset="0"/>
                 <a:cs typeface="Times New Roman" panose="02020603050405020304" pitchFamily="18" charset="0"/>
               </a:rPr>
@@ -10885,7 +10939,6 @@
             </a:r>
             <a:endParaRPr lang="it-IT" sz="2800" dirty="0">
               <a:effectLst/>
-              <a:latin typeface="Calibri" panose="020F0502020204030204" pitchFamily="34" charset="0"/>
               <a:ea typeface="Calibri" panose="020F0502020204030204" pitchFamily="34" charset="0"/>
               <a:cs typeface="Times New Roman" panose="02020603050405020304" pitchFamily="18" charset="0"/>
             </a:endParaRPr>
@@ -11021,7 +11074,6 @@
             <a:r>
               <a:rPr lang="en-US" sz="2800" dirty="0">
                 <a:effectLst/>
-                <a:latin typeface="Palatino Linotype" panose="02040502050505030304" pitchFamily="18" charset="0"/>
                 <a:ea typeface="Calibri" panose="020F0502020204030204" pitchFamily="34" charset="0"/>
                 <a:cs typeface="Times New Roman" panose="02020603050405020304" pitchFamily="18" charset="0"/>
               </a:rPr>
@@ -11029,7 +11081,6 @@
             </a:r>
             <a:endParaRPr lang="it-IT" sz="2800" dirty="0">
               <a:effectLst/>
-              <a:latin typeface="Calibri" panose="020F0502020204030204" pitchFamily="34" charset="0"/>
               <a:ea typeface="Calibri" panose="020F0502020204030204" pitchFamily="34" charset="0"/>
               <a:cs typeface="Times New Roman" panose="02020603050405020304" pitchFamily="18" charset="0"/>
             </a:endParaRPr>
@@ -11042,7 +11093,6 @@
             <a:r>
               <a:rPr lang="en-US" sz="2800" dirty="0">
                 <a:effectLst/>
-                <a:latin typeface="Palatino Linotype" panose="02040502050505030304" pitchFamily="18" charset="0"/>
                 <a:ea typeface="Calibri" panose="020F0502020204030204" pitchFamily="34" charset="0"/>
                 <a:cs typeface="Times New Roman" panose="02020603050405020304" pitchFamily="18" charset="0"/>
               </a:rPr>
@@ -11050,7 +11100,6 @@
             </a:r>
             <a:endParaRPr lang="it-IT" sz="2800" dirty="0">
               <a:effectLst/>
-              <a:latin typeface="Calibri" panose="020F0502020204030204" pitchFamily="34" charset="0"/>
               <a:ea typeface="Calibri" panose="020F0502020204030204" pitchFamily="34" charset="0"/>
               <a:cs typeface="Times New Roman" panose="02020603050405020304" pitchFamily="18" charset="0"/>
             </a:endParaRPr>
@@ -11063,7 +11112,6 @@
             <a:r>
               <a:rPr lang="en-US" sz="2800" dirty="0">
                 <a:effectLst/>
-                <a:latin typeface="Palatino Linotype" panose="02040502050505030304" pitchFamily="18" charset="0"/>
                 <a:ea typeface="Calibri" panose="020F0502020204030204" pitchFamily="34" charset="0"/>
                 <a:cs typeface="Times New Roman" panose="02020603050405020304" pitchFamily="18" charset="0"/>
               </a:rPr>
@@ -11071,7 +11119,6 @@
             </a:r>
             <a:endParaRPr lang="it-IT" sz="2800" dirty="0">
               <a:effectLst/>
-              <a:latin typeface="Calibri" panose="020F0502020204030204" pitchFamily="34" charset="0"/>
               <a:ea typeface="Calibri" panose="020F0502020204030204" pitchFamily="34" charset="0"/>
               <a:cs typeface="Times New Roman" panose="02020603050405020304" pitchFamily="18" charset="0"/>
             </a:endParaRPr>
@@ -11087,7 +11134,6 @@
                   <a:srgbClr val="00B050"/>
                 </a:solidFill>
                 <a:effectLst/>
-                <a:latin typeface="Palatino Linotype" panose="02040502050505030304" pitchFamily="18" charset="0"/>
                 <a:ea typeface="Calibri" panose="020F0502020204030204" pitchFamily="34" charset="0"/>
                 <a:cs typeface="Times New Roman" panose="02020603050405020304" pitchFamily="18" charset="0"/>
               </a:rPr>
@@ -11098,7 +11144,6 @@
                 <a:srgbClr val="00B050"/>
               </a:solidFill>
               <a:effectLst/>
-              <a:latin typeface="Calibri" panose="020F0502020204030204" pitchFamily="34" charset="0"/>
               <a:ea typeface="Calibri" panose="020F0502020204030204" pitchFamily="34" charset="0"/>
               <a:cs typeface="Times New Roman" panose="02020603050405020304" pitchFamily="18" charset="0"/>
             </a:endParaRPr>
@@ -11111,7 +11156,6 @@
             <a:r>
               <a:rPr lang="en-US" sz="2800" dirty="0">
                 <a:effectLst/>
-                <a:latin typeface="Palatino Linotype" panose="02040502050505030304" pitchFamily="18" charset="0"/>
                 <a:ea typeface="Calibri" panose="020F0502020204030204" pitchFamily="34" charset="0"/>
                 <a:cs typeface="Times New Roman" panose="02020603050405020304" pitchFamily="18" charset="0"/>
               </a:rPr>
@@ -11119,7 +11163,6 @@
             </a:r>
             <a:endParaRPr lang="it-IT" sz="2800" dirty="0">
               <a:effectLst/>
-              <a:latin typeface="Calibri" panose="020F0502020204030204" pitchFamily="34" charset="0"/>
               <a:ea typeface="Calibri" panose="020F0502020204030204" pitchFamily="34" charset="0"/>
               <a:cs typeface="Times New Roman" panose="02020603050405020304" pitchFamily="18" charset="0"/>
             </a:endParaRPr>
@@ -11262,7 +11305,6 @@
             <a:r>
               <a:rPr lang="en-US" sz="2400" dirty="0">
                 <a:effectLst/>
-                <a:latin typeface="Palatino Linotype" panose="02040502050505030304" pitchFamily="18" charset="0"/>
                 <a:ea typeface="Calibri" panose="020F0502020204030204" pitchFamily="34" charset="0"/>
                 <a:cs typeface="Times New Roman" panose="02020603050405020304" pitchFamily="18" charset="0"/>
               </a:rPr>
@@ -11270,7 +11312,6 @@
             </a:r>
             <a:endParaRPr lang="it-IT" sz="2400" dirty="0">
               <a:effectLst/>
-              <a:latin typeface="Calibri" panose="020F0502020204030204" pitchFamily="34" charset="0"/>
               <a:ea typeface="Calibri" panose="020F0502020204030204" pitchFamily="34" charset="0"/>
               <a:cs typeface="Times New Roman" panose="02020603050405020304" pitchFamily="18" charset="0"/>
             </a:endParaRPr>
@@ -11282,7 +11323,6 @@
             <a:r>
               <a:rPr lang="en-US" sz="2400" dirty="0">
                 <a:effectLst/>
-                <a:latin typeface="Palatino Linotype" panose="02040502050505030304" pitchFamily="18" charset="0"/>
                 <a:ea typeface="Calibri" panose="020F0502020204030204" pitchFamily="34" charset="0"/>
                 <a:cs typeface="Times New Roman" panose="02020603050405020304" pitchFamily="18" charset="0"/>
               </a:rPr>
@@ -11296,7 +11336,6 @@
             <a:r>
               <a:rPr lang="en-US" sz="2400" dirty="0">
                 <a:effectLst/>
-                <a:latin typeface="Palatino Linotype" panose="02040502050505030304" pitchFamily="18" charset="0"/>
                 <a:ea typeface="Calibri" panose="020F0502020204030204" pitchFamily="34" charset="0"/>
                 <a:cs typeface="Times New Roman" panose="02020603050405020304" pitchFamily="18" charset="0"/>
               </a:rPr>
@@ -11305,7 +11344,6 @@
             <a:r>
               <a:rPr lang="en-US" sz="2400" dirty="0">
                 <a:effectLst/>
-                <a:latin typeface="Palatino Linotype" panose="02040502050505030304" pitchFamily="18" charset="0"/>
                 <a:ea typeface="Calibri" panose="020F0502020204030204" pitchFamily="34" charset="0"/>
                 <a:cs typeface="Times New Roman" panose="02020603050405020304" pitchFamily="18" charset="0"/>
                 <a:hlinkClick r:id="rId2"/>
@@ -11314,7 +11352,6 @@
             </a:r>
             <a:endParaRPr lang="en-US" sz="2400" dirty="0">
               <a:effectLst/>
-              <a:latin typeface="Palatino Linotype" panose="02040502050505030304" pitchFamily="18" charset="0"/>
               <a:ea typeface="Calibri" panose="020F0502020204030204" pitchFamily="34" charset="0"/>
               <a:cs typeface="Times New Roman" panose="02020603050405020304" pitchFamily="18" charset="0"/>
             </a:endParaRPr>
@@ -11325,7 +11362,6 @@
             </a:pPr>
             <a:endParaRPr lang="it-IT" sz="2400" dirty="0">
               <a:effectLst/>
-              <a:latin typeface="Calibri" panose="020F0502020204030204" pitchFamily="34" charset="0"/>
               <a:ea typeface="Calibri" panose="020F0502020204030204" pitchFamily="34" charset="0"/>
               <a:cs typeface="Times New Roman" panose="02020603050405020304" pitchFamily="18" charset="0"/>
             </a:endParaRPr>
@@ -11337,7 +11373,6 @@
             <a:r>
               <a:rPr lang="en-US" sz="2400" dirty="0">
                 <a:effectLst/>
-                <a:latin typeface="Palatino Linotype" panose="02040502050505030304" pitchFamily="18" charset="0"/>
                 <a:ea typeface="Calibri" panose="020F0502020204030204" pitchFamily="34" charset="0"/>
                 <a:cs typeface="Times New Roman" panose="02020603050405020304" pitchFamily="18" charset="0"/>
               </a:rPr>
@@ -11345,7 +11380,6 @@
             </a:r>
             <a:endParaRPr lang="it-IT" sz="2400" dirty="0">
               <a:effectLst/>
-              <a:latin typeface="Calibri" panose="020F0502020204030204" pitchFamily="34" charset="0"/>
               <a:ea typeface="Calibri" panose="020F0502020204030204" pitchFamily="34" charset="0"/>
               <a:cs typeface="Times New Roman" panose="02020603050405020304" pitchFamily="18" charset="0"/>
             </a:endParaRPr>
@@ -11357,7 +11391,6 @@
             <a:r>
               <a:rPr lang="en-US" sz="2400" dirty="0">
                 <a:effectLst/>
-                <a:latin typeface="Palatino Linotype" panose="02040502050505030304" pitchFamily="18" charset="0"/>
                 <a:ea typeface="Calibri" panose="020F0502020204030204" pitchFamily="34" charset="0"/>
                 <a:cs typeface="Times New Roman" panose="02020603050405020304" pitchFamily="18" charset="0"/>
               </a:rPr>
@@ -11365,7 +11398,6 @@
             </a:r>
             <a:endParaRPr lang="it-IT" sz="2400" dirty="0">
               <a:effectLst/>
-              <a:latin typeface="Calibri" panose="020F0502020204030204" pitchFamily="34" charset="0"/>
               <a:ea typeface="Calibri" panose="020F0502020204030204" pitchFamily="34" charset="0"/>
               <a:cs typeface="Times New Roman" panose="02020603050405020304" pitchFamily="18" charset="0"/>
             </a:endParaRPr>
@@ -11384,7 +11416,6 @@
             <a:r>
               <a:rPr lang="en-US" sz="2400" dirty="0">
                 <a:effectLst/>
-                <a:latin typeface="Palatino Linotype" panose="02040502050505030304" pitchFamily="18" charset="0"/>
                 <a:ea typeface="Calibri" panose="020F0502020204030204" pitchFamily="34" charset="0"/>
                 <a:cs typeface="Times New Roman" panose="02020603050405020304" pitchFamily="18" charset="0"/>
               </a:rPr>
@@ -11392,7 +11423,6 @@
             </a:r>
             <a:endParaRPr lang="it-IT" sz="2400" dirty="0">
               <a:effectLst/>
-              <a:latin typeface="Calibri" panose="020F0502020204030204" pitchFamily="34" charset="0"/>
               <a:ea typeface="Calibri" panose="020F0502020204030204" pitchFamily="34" charset="0"/>
               <a:cs typeface="Times New Roman" panose="02020603050405020304" pitchFamily="18" charset="0"/>
             </a:endParaRPr>
@@ -11404,7 +11434,6 @@
             <a:r>
               <a:rPr lang="en-US" sz="2400" dirty="0">
                 <a:effectLst/>
-                <a:latin typeface="Palatino Linotype" panose="02040502050505030304" pitchFamily="18" charset="0"/>
                 <a:ea typeface="Calibri" panose="020F0502020204030204" pitchFamily="34" charset="0"/>
                 <a:cs typeface="Times New Roman" panose="02020603050405020304" pitchFamily="18" charset="0"/>
               </a:rPr>
@@ -11412,7 +11441,6 @@
             </a:r>
             <a:endParaRPr lang="it-IT" sz="2400" dirty="0">
               <a:effectLst/>
-              <a:latin typeface="Calibri" panose="020F0502020204030204" pitchFamily="34" charset="0"/>
               <a:ea typeface="Calibri" panose="020F0502020204030204" pitchFamily="34" charset="0"/>
               <a:cs typeface="Times New Roman" panose="02020603050405020304" pitchFamily="18" charset="0"/>
             </a:endParaRPr>
@@ -11425,7 +11453,6 @@
             <a:r>
               <a:rPr lang="en-US" sz="2400" dirty="0">
                 <a:effectLst/>
-                <a:latin typeface="Palatino Linotype" panose="02040502050505030304" pitchFamily="18" charset="0"/>
                 <a:ea typeface="Calibri" panose="020F0502020204030204" pitchFamily="34" charset="0"/>
                 <a:cs typeface="Times New Roman" panose="02020603050405020304" pitchFamily="18" charset="0"/>
               </a:rPr>
@@ -11437,7 +11464,6 @@
                   <a:srgbClr val="0563C1"/>
                 </a:solidFill>
                 <a:effectLst/>
-                <a:latin typeface="Palatino Linotype" panose="02040502050505030304" pitchFamily="18" charset="0"/>
                 <a:ea typeface="Calibri" panose="020F0502020204030204" pitchFamily="34" charset="0"/>
                 <a:cs typeface="Times New Roman" panose="02020603050405020304" pitchFamily="18" charset="0"/>
                 <a:hlinkClick r:id="rId3"/>
@@ -11446,7 +11472,6 @@
             </a:r>
             <a:endParaRPr lang="it-IT" sz="2400" dirty="0">
               <a:effectLst/>
-              <a:latin typeface="Calibri" panose="020F0502020204030204" pitchFamily="34" charset="0"/>
               <a:ea typeface="Calibri" panose="020F0502020204030204" pitchFamily="34" charset="0"/>
               <a:cs typeface="Times New Roman" panose="02020603050405020304" pitchFamily="18" charset="0"/>
             </a:endParaRPr>
@@ -11459,7 +11484,6 @@
             <a:r>
               <a:rPr lang="en-US" sz="2400" dirty="0">
                 <a:effectLst/>
-                <a:latin typeface="Palatino Linotype" panose="02040502050505030304" pitchFamily="18" charset="0"/>
                 <a:ea typeface="Calibri" panose="020F0502020204030204" pitchFamily="34" charset="0"/>
                 <a:cs typeface="Times New Roman" panose="02020603050405020304" pitchFamily="18" charset="0"/>
               </a:rPr>
@@ -11495,7 +11519,6 @@
             <a:r>
               <a:rPr lang="en-US" sz="2400" dirty="0">
                 <a:effectLst/>
-                <a:latin typeface="Palatino Linotype" panose="02040502050505030304" pitchFamily="18" charset="0"/>
                 <a:ea typeface="Calibri" panose="020F0502020204030204" pitchFamily="34" charset="0"/>
                 <a:cs typeface="Times New Roman" panose="02020603050405020304" pitchFamily="18" charset="0"/>
               </a:rPr>
@@ -11503,7 +11526,6 @@
             </a:r>
             <a:endParaRPr lang="it-IT" sz="2400" dirty="0">
               <a:effectLst/>
-              <a:latin typeface="Calibri" panose="020F0502020204030204" pitchFamily="34" charset="0"/>
               <a:ea typeface="Calibri" panose="020F0502020204030204" pitchFamily="34" charset="0"/>
               <a:cs typeface="Times New Roman" panose="02020603050405020304" pitchFamily="18" charset="0"/>
             </a:endParaRPr>
@@ -11516,7 +11538,6 @@
             <a:r>
               <a:rPr lang="en-US" sz="2400" dirty="0">
                 <a:effectLst/>
-                <a:latin typeface="Palatino Linotype" panose="02040502050505030304" pitchFamily="18" charset="0"/>
                 <a:ea typeface="Calibri" panose="020F0502020204030204" pitchFamily="34" charset="0"/>
                 <a:cs typeface="Times New Roman" panose="02020603050405020304" pitchFamily="18" charset="0"/>
               </a:rPr>
@@ -11528,7 +11549,6 @@
                   <a:srgbClr val="0563C1"/>
                 </a:solidFill>
                 <a:effectLst/>
-                <a:latin typeface="Palatino Linotype" panose="02040502050505030304" pitchFamily="18" charset="0"/>
                 <a:ea typeface="Calibri" panose="020F0502020204030204" pitchFamily="34" charset="0"/>
                 <a:cs typeface="Times New Roman" panose="02020603050405020304" pitchFamily="18" charset="0"/>
                 <a:hlinkClick r:id="rId3"/>
@@ -11538,14 +11558,12 @@
             <a:r>
               <a:rPr lang="en-US" sz="2400" dirty="0">
                 <a:effectLst/>
-                <a:latin typeface="Palatino Linotype" panose="02040502050505030304" pitchFamily="18" charset="0"/>
                 <a:ea typeface="Calibri" panose="020F0502020204030204" pitchFamily="34" charset="0"/>
                 <a:cs typeface="Times New Roman" panose="02020603050405020304" pitchFamily="18" charset="0"/>
               </a:rPr>
               <a:t> with the book list containing the book “A Brief History of Time” by “Stephen Hawking”</a:t>
             </a:r>
             <a:endParaRPr lang="it-IT" dirty="0">
-              <a:latin typeface="Calibri" panose="020F0502020204030204" pitchFamily="34" charset="0"/>
               <a:ea typeface="Calibri" panose="020F0502020204030204" pitchFamily="34" charset="0"/>
               <a:cs typeface="Times New Roman" panose="02020603050405020304" pitchFamily="18" charset="0"/>
             </a:endParaRPr>
@@ -11558,7 +11576,6 @@
             <a:r>
               <a:rPr lang="en-US" sz="2400" dirty="0">
                 <a:effectLst/>
-                <a:latin typeface="Palatino Linotype" panose="02040502050505030304" pitchFamily="18" charset="0"/>
                 <a:ea typeface="Calibri" panose="020F0502020204030204" pitchFamily="34" charset="0"/>
                 <a:cs typeface="Times New Roman" panose="02020603050405020304" pitchFamily="18" charset="0"/>
               </a:rPr>
@@ -11701,7 +11718,6 @@
             <a:r>
               <a:rPr lang="en-US" sz="2400" dirty="0">
                 <a:effectLst/>
-                <a:latin typeface="Palatino Linotype" panose="02040502050505030304" pitchFamily="18" charset="0"/>
                 <a:ea typeface="Calibri" panose="020F0502020204030204" pitchFamily="34" charset="0"/>
                 <a:cs typeface="Times New Roman" panose="02020603050405020304" pitchFamily="18" charset="0"/>
               </a:rPr>
@@ -11709,7 +11725,6 @@
             </a:r>
             <a:endParaRPr lang="it-IT" sz="2400" dirty="0">
               <a:effectLst/>
-              <a:latin typeface="Calibri" panose="020F0502020204030204" pitchFamily="34" charset="0"/>
               <a:ea typeface="Calibri" panose="020F0502020204030204" pitchFamily="34" charset="0"/>
               <a:cs typeface="Times New Roman" panose="02020603050405020304" pitchFamily="18" charset="0"/>
             </a:endParaRPr>
@@ -11721,7 +11736,6 @@
             <a:r>
               <a:rPr lang="en-US" sz="2400" dirty="0">
                 <a:effectLst/>
-                <a:latin typeface="Palatino Linotype" panose="02040502050505030304" pitchFamily="18" charset="0"/>
                 <a:ea typeface="Calibri" panose="020F0502020204030204" pitchFamily="34" charset="0"/>
                 <a:cs typeface="Times New Roman" panose="02020603050405020304" pitchFamily="18" charset="0"/>
               </a:rPr>
@@ -11735,7 +11749,6 @@
             <a:r>
               <a:rPr lang="en-US" sz="2400" dirty="0">
                 <a:effectLst/>
-                <a:latin typeface="Palatino Linotype" panose="02040502050505030304" pitchFamily="18" charset="0"/>
                 <a:ea typeface="Calibri" panose="020F0502020204030204" pitchFamily="34" charset="0"/>
                 <a:cs typeface="Times New Roman" panose="02020603050405020304" pitchFamily="18" charset="0"/>
               </a:rPr>
@@ -11744,7 +11757,6 @@
             <a:r>
               <a:rPr lang="en-US" sz="2400" dirty="0">
                 <a:effectLst/>
-                <a:latin typeface="Palatino Linotype" panose="02040502050505030304" pitchFamily="18" charset="0"/>
                 <a:ea typeface="Calibri" panose="020F0502020204030204" pitchFamily="34" charset="0"/>
                 <a:cs typeface="Times New Roman" panose="02020603050405020304" pitchFamily="18" charset="0"/>
                 <a:hlinkClick r:id="rId2"/>
@@ -11753,7 +11765,6 @@
             </a:r>
             <a:endParaRPr lang="en-US" sz="2400" dirty="0">
               <a:effectLst/>
-              <a:latin typeface="Palatino Linotype" panose="02040502050505030304" pitchFamily="18" charset="0"/>
               <a:ea typeface="Calibri" panose="020F0502020204030204" pitchFamily="34" charset="0"/>
               <a:cs typeface="Times New Roman" panose="02020603050405020304" pitchFamily="18" charset="0"/>
             </a:endParaRPr>
@@ -11764,7 +11775,6 @@
             </a:pPr>
             <a:endParaRPr lang="it-IT" sz="2400" dirty="0">
               <a:effectLst/>
-              <a:latin typeface="Calibri" panose="020F0502020204030204" pitchFamily="34" charset="0"/>
               <a:ea typeface="Calibri" panose="020F0502020204030204" pitchFamily="34" charset="0"/>
               <a:cs typeface="Times New Roman" panose="02020603050405020304" pitchFamily="18" charset="0"/>
             </a:endParaRPr>
@@ -11776,7 +11786,6 @@
             <a:r>
               <a:rPr lang="en-US" sz="2400" dirty="0">
                 <a:effectLst/>
-                <a:latin typeface="Palatino Linotype" panose="02040502050505030304" pitchFamily="18" charset="0"/>
                 <a:ea typeface="Calibri" panose="020F0502020204030204" pitchFamily="34" charset="0"/>
                 <a:cs typeface="Times New Roman" panose="02020603050405020304" pitchFamily="18" charset="0"/>
               </a:rPr>
@@ -11784,7 +11793,6 @@
             </a:r>
             <a:endParaRPr lang="it-IT" sz="2400" dirty="0">
               <a:effectLst/>
-              <a:latin typeface="Calibri" panose="020F0502020204030204" pitchFamily="34" charset="0"/>
               <a:ea typeface="Calibri" panose="020F0502020204030204" pitchFamily="34" charset="0"/>
               <a:cs typeface="Times New Roman" panose="02020603050405020304" pitchFamily="18" charset="0"/>
             </a:endParaRPr>
@@ -11796,7 +11804,6 @@
             <a:r>
               <a:rPr lang="en-US" sz="2400" dirty="0">
                 <a:effectLst/>
-                <a:latin typeface="Palatino Linotype" panose="02040502050505030304" pitchFamily="18" charset="0"/>
                 <a:ea typeface="Calibri" panose="020F0502020204030204" pitchFamily="34" charset="0"/>
                 <a:cs typeface="Times New Roman" panose="02020603050405020304" pitchFamily="18" charset="0"/>
               </a:rPr>
@@ -11804,7 +11811,6 @@
             </a:r>
             <a:endParaRPr lang="it-IT" sz="2400" dirty="0">
               <a:effectLst/>
-              <a:latin typeface="Calibri" panose="020F0502020204030204" pitchFamily="34" charset="0"/>
               <a:ea typeface="Calibri" panose="020F0502020204030204" pitchFamily="34" charset="0"/>
               <a:cs typeface="Times New Roman" panose="02020603050405020304" pitchFamily="18" charset="0"/>
             </a:endParaRPr>
@@ -11823,7 +11829,6 @@
             <a:r>
               <a:rPr lang="en-US" sz="2400" dirty="0">
                 <a:effectLst/>
-                <a:latin typeface="Palatino Linotype" panose="02040502050505030304" pitchFamily="18" charset="0"/>
                 <a:ea typeface="Calibri" panose="020F0502020204030204" pitchFamily="34" charset="0"/>
                 <a:cs typeface="Times New Roman" panose="02020603050405020304" pitchFamily="18" charset="0"/>
               </a:rPr>
@@ -11831,7 +11836,6 @@
             </a:r>
             <a:endParaRPr lang="it-IT" sz="2400" dirty="0">
               <a:effectLst/>
-              <a:latin typeface="Calibri" panose="020F0502020204030204" pitchFamily="34" charset="0"/>
               <a:ea typeface="Calibri" panose="020F0502020204030204" pitchFamily="34" charset="0"/>
               <a:cs typeface="Times New Roman" panose="02020603050405020304" pitchFamily="18" charset="0"/>
             </a:endParaRPr>
@@ -11843,7 +11847,6 @@
             <a:r>
               <a:rPr lang="en-US" sz="2400" dirty="0">
                 <a:effectLst/>
-                <a:latin typeface="Palatino Linotype" panose="02040502050505030304" pitchFamily="18" charset="0"/>
                 <a:ea typeface="Calibri" panose="020F0502020204030204" pitchFamily="34" charset="0"/>
                 <a:cs typeface="Times New Roman" panose="02020603050405020304" pitchFamily="18" charset="0"/>
               </a:rPr>
@@ -11851,7 +11854,6 @@
             </a:r>
             <a:endParaRPr lang="it-IT" sz="2400" dirty="0">
               <a:effectLst/>
-              <a:latin typeface="Calibri" panose="020F0502020204030204" pitchFamily="34" charset="0"/>
               <a:ea typeface="Calibri" panose="020F0502020204030204" pitchFamily="34" charset="0"/>
               <a:cs typeface="Times New Roman" panose="02020603050405020304" pitchFamily="18" charset="0"/>
             </a:endParaRPr>
@@ -11864,7 +11866,6 @@
             <a:r>
               <a:rPr lang="en-US" sz="2400" dirty="0">
                 <a:effectLst/>
-                <a:latin typeface="Palatino Linotype" panose="02040502050505030304" pitchFamily="18" charset="0"/>
                 <a:ea typeface="Calibri" panose="020F0502020204030204" pitchFamily="34" charset="0"/>
                 <a:cs typeface="Times New Roman" panose="02020603050405020304" pitchFamily="18" charset="0"/>
               </a:rPr>
@@ -11876,7 +11877,6 @@
                   <a:srgbClr val="0563C1"/>
                 </a:solidFill>
                 <a:effectLst/>
-                <a:latin typeface="Palatino Linotype" panose="02040502050505030304" pitchFamily="18" charset="0"/>
                 <a:ea typeface="Calibri" panose="020F0502020204030204" pitchFamily="34" charset="0"/>
                 <a:cs typeface="Times New Roman" panose="02020603050405020304" pitchFamily="18" charset="0"/>
                 <a:hlinkClick r:id="rId3"/>
@@ -11885,7 +11885,6 @@
             </a:r>
             <a:endParaRPr lang="it-IT" sz="2400" dirty="0">
               <a:effectLst/>
-              <a:latin typeface="Calibri" panose="020F0502020204030204" pitchFamily="34" charset="0"/>
               <a:ea typeface="Calibri" panose="020F0502020204030204" pitchFamily="34" charset="0"/>
               <a:cs typeface="Times New Roman" panose="02020603050405020304" pitchFamily="18" charset="0"/>
             </a:endParaRPr>
@@ -11901,7 +11900,6 @@
                   <a:srgbClr val="00B050"/>
                 </a:solidFill>
                 <a:effectLst/>
-                <a:latin typeface="Palatino Linotype" panose="02040502050505030304" pitchFamily="18" charset="0"/>
                 <a:ea typeface="Calibri" panose="020F0502020204030204" pitchFamily="34" charset="0"/>
                 <a:cs typeface="Times New Roman" panose="02020603050405020304" pitchFamily="18" charset="0"/>
               </a:rPr>
@@ -11913,7 +11911,6 @@
                   <a:srgbClr val="00B050"/>
                 </a:solidFill>
                 <a:effectLst/>
-                <a:latin typeface="Palatino Linotype" panose="02040502050505030304" pitchFamily="18" charset="0"/>
                 <a:ea typeface="Calibri" panose="020F0502020204030204" pitchFamily="34" charset="0"/>
                 <a:cs typeface="Times New Roman" panose="02020603050405020304" pitchFamily="18" charset="0"/>
                 <a:hlinkClick r:id="rId3"/>
@@ -11926,7 +11923,6 @@
                   <a:srgbClr val="00B050"/>
                 </a:solidFill>
                 <a:effectLst/>
-                <a:latin typeface="Palatino Linotype" panose="02040502050505030304" pitchFamily="18" charset="0"/>
                 <a:ea typeface="Calibri" panose="020F0502020204030204" pitchFamily="34" charset="0"/>
                 <a:cs typeface="Times New Roman" panose="02020603050405020304" pitchFamily="18" charset="0"/>
               </a:rPr>
@@ -11934,7 +11930,6 @@
             </a:r>
             <a:endParaRPr lang="it-IT" sz="2400" b="1" dirty="0">
               <a:effectLst/>
-              <a:latin typeface="Calibri" panose="020F0502020204030204" pitchFamily="34" charset="0"/>
               <a:ea typeface="Calibri" panose="020F0502020204030204" pitchFamily="34" charset="0"/>
               <a:cs typeface="Times New Roman" panose="02020603050405020304" pitchFamily="18" charset="0"/>
             </a:endParaRPr>
@@ -11947,7 +11942,6 @@
             <a:r>
               <a:rPr lang="en-US" sz="2400" dirty="0">
                 <a:effectLst/>
-                <a:latin typeface="Palatino Linotype" panose="02040502050505030304" pitchFamily="18" charset="0"/>
                 <a:ea typeface="Calibri" panose="020F0502020204030204" pitchFamily="34" charset="0"/>
                 <a:cs typeface="Times New Roman" panose="02020603050405020304" pitchFamily="18" charset="0"/>
               </a:rPr>
@@ -11959,7 +11953,6 @@
                   <a:srgbClr val="0563C1"/>
                 </a:solidFill>
                 <a:effectLst/>
-                <a:latin typeface="Palatino Linotype" panose="02040502050505030304" pitchFamily="18" charset="0"/>
                 <a:ea typeface="Calibri" panose="020F0502020204030204" pitchFamily="34" charset="0"/>
                 <a:cs typeface="Times New Roman" panose="02020603050405020304" pitchFamily="18" charset="0"/>
                 <a:hlinkClick r:id="rId3"/>
@@ -11969,14 +11962,12 @@
             <a:r>
               <a:rPr lang="en-US" sz="2400" dirty="0">
                 <a:effectLst/>
-                <a:latin typeface="Palatino Linotype" panose="02040502050505030304" pitchFamily="18" charset="0"/>
                 <a:ea typeface="Calibri" panose="020F0502020204030204" pitchFamily="34" charset="0"/>
                 <a:cs typeface="Times New Roman" panose="02020603050405020304" pitchFamily="18" charset="0"/>
               </a:rPr>
               <a:t> with the book list containing the book “A Brief History of Time” by “Stephen Hawking”</a:t>
             </a:r>
             <a:endParaRPr lang="it-IT" dirty="0">
-              <a:latin typeface="Calibri" panose="020F0502020204030204" pitchFamily="34" charset="0"/>
               <a:ea typeface="Calibri" panose="020F0502020204030204" pitchFamily="34" charset="0"/>
               <a:cs typeface="Times New Roman" panose="02020603050405020304" pitchFamily="18" charset="0"/>
             </a:endParaRPr>
@@ -11989,7 +11980,6 @@
             <a:r>
               <a:rPr lang="en-US" sz="2400" dirty="0">
                 <a:effectLst/>
-                <a:latin typeface="Palatino Linotype" panose="02040502050505030304" pitchFamily="18" charset="0"/>
                 <a:ea typeface="Calibri" panose="020F0502020204030204" pitchFamily="34" charset="0"/>
                 <a:cs typeface="Times New Roman" panose="02020603050405020304" pitchFamily="18" charset="0"/>
               </a:rPr>
